--- a/cursos/recursos/aperturas-y-defensas/11-sistema-reti.pptx
+++ b/cursos/recursos/aperturas-y-defensas/11-sistema-reti.pptx
@@ -1602,7 +1602,7 @@
                 <a:ea typeface="Calibri" pitchFamily="34" charset="-122"/>
                 <a:cs typeface="Calibri" pitchFamily="34" charset="-120"/>
               </a:rPr>
-              <a:t>1.Nf3 seguido de g3, Bg2 y c4 desarrolla las piezas antes de decidir la estructura de peones central, dejando que el rival revele sus intenciones primero.</a:t>
+              <a:t>1.Cf3 seguido de g3, Ag2 y c4 desarrolla las piezas antes de decidir la estructura de peones central, dejando que el rival revele sus intenciones primero.</a:t>
             </a:r>
             <a:endParaRPr lang="en-US" sz="1600" dirty="0"/>
           </a:p>
